--- a/docs/sales/decks/How-you-get-paid.pptx
+++ b/docs/sales/decks/How-you-get-paid.pptx
@@ -4388,8 +4388,8 @@
         </p:nvSpPr>
         <p:spPr>
           <a:xfrm>
-            <a:off x="731520" y="2148840"/>
-            <a:ext cx="10698480" cy="841248"/>
+            <a:off x="731520" y="2057400"/>
+            <a:ext cx="10698480" cy="786384"/>
           </a:xfrm>
           <a:prstGeom prst="rect">
             <a:avLst/>
@@ -4408,7 +4408,7 @@
         </p:nvSpPr>
         <p:spPr>
           <a:xfrm>
-            <a:off x="960120" y="2221992"/>
+            <a:off x="960120" y="2130552"/>
             <a:ext cx="2926080" cy="694944"/>
           </a:xfrm>
           <a:prstGeom prst="rect">
@@ -4447,7 +4447,7 @@
         </p:nvSpPr>
         <p:spPr>
           <a:xfrm>
-            <a:off x="4023360" y="2221992"/>
+            <a:off x="4023360" y="2130552"/>
             <a:ext cx="7132320" cy="694944"/>
           </a:xfrm>
           <a:prstGeom prst="rect">
@@ -4486,8 +4486,8 @@
         </p:nvSpPr>
         <p:spPr>
           <a:xfrm>
-            <a:off x="731520" y="3108960"/>
-            <a:ext cx="10698480" cy="841248"/>
+            <a:off x="731520" y="2944368"/>
+            <a:ext cx="10698480" cy="786384"/>
           </a:xfrm>
           <a:prstGeom prst="rect">
             <a:avLst/>
@@ -4506,7 +4506,7 @@
         </p:nvSpPr>
         <p:spPr>
           <a:xfrm>
-            <a:off x="960120" y="3182112"/>
+            <a:off x="960120" y="3017520"/>
             <a:ext cx="2926080" cy="694944"/>
           </a:xfrm>
           <a:prstGeom prst="rect">
@@ -4545,7 +4545,7 @@
         </p:nvSpPr>
         <p:spPr>
           <a:xfrm>
-            <a:off x="4023360" y="3182112"/>
+            <a:off x="4023360" y="3017520"/>
             <a:ext cx="7132320" cy="694944"/>
           </a:xfrm>
           <a:prstGeom prst="rect">
@@ -4584,8 +4584,8 @@
         </p:nvSpPr>
         <p:spPr>
           <a:xfrm>
-            <a:off x="731520" y="4069080"/>
-            <a:ext cx="10698480" cy="841248"/>
+            <a:off x="731520" y="3831336"/>
+            <a:ext cx="10698480" cy="786384"/>
           </a:xfrm>
           <a:prstGeom prst="rect">
             <a:avLst/>
@@ -4604,7 +4604,7 @@
         </p:nvSpPr>
         <p:spPr>
           <a:xfrm>
-            <a:off x="960120" y="4142232"/>
+            <a:off x="960120" y="3904488"/>
             <a:ext cx="2926080" cy="694944"/>
           </a:xfrm>
           <a:prstGeom prst="rect">
@@ -4643,7 +4643,7 @@
         </p:nvSpPr>
         <p:spPr>
           <a:xfrm>
-            <a:off x="4023360" y="4142232"/>
+            <a:off x="4023360" y="3904488"/>
             <a:ext cx="7132320" cy="694944"/>
           </a:xfrm>
           <a:prstGeom prst="rect">
@@ -4682,8 +4682,8 @@
         </p:nvSpPr>
         <p:spPr>
           <a:xfrm>
-            <a:off x="731520" y="5029200"/>
-            <a:ext cx="10698480" cy="841248"/>
+            <a:off x="731520" y="4718304"/>
+            <a:ext cx="10698480" cy="786384"/>
           </a:xfrm>
           <a:prstGeom prst="rect">
             <a:avLst/>
@@ -4702,7 +4702,7 @@
         </p:nvSpPr>
         <p:spPr>
           <a:xfrm>
-            <a:off x="960120" y="5102352"/>
+            <a:off x="960120" y="4791456"/>
             <a:ext cx="2926080" cy="694944"/>
           </a:xfrm>
           <a:prstGeom prst="rect">
@@ -4727,7 +4727,7 @@
                 <a:ea typeface="Calibri" pitchFamily="34" charset="-122"/>
                 <a:cs typeface="Calibri" pitchFamily="34" charset="-120"/>
               </a:rPr>
-              <a:t>Bank transfer</a:t>
+              <a:t>Wise</a:t>
             </a:r>
             <a:endParaRPr lang="en-US" sz="1500" dirty="0"/>
           </a:p>
@@ -4741,7 +4741,7 @@
         </p:nvSpPr>
         <p:spPr>
           <a:xfrm>
-            <a:off x="4023360" y="5102352"/>
+            <a:off x="4023360" y="4791456"/>
             <a:ext cx="7132320" cy="694944"/>
           </a:xfrm>
           <a:prstGeom prst="rect">
@@ -4766,6 +4766,104 @@
                 <a:ea typeface="Calibri" pitchFamily="34" charset="-122"/>
                 <a:cs typeface="Calibri" pitchFamily="34" charset="-120"/>
               </a:rPr>
+              <a:t>Best if you are outside Canada. Mid-market rate, fee shown up front, and it can land in your own currency.</a:t>
+            </a:r>
+            <a:endParaRPr lang="en-US" sz="1250" dirty="0"/>
+          </a:p>
+        </p:txBody>
+      </p:sp>
+      <p:sp>
+        <p:nvSpPr>
+          <p:cNvPr id="16" name="Shape 14"/>
+          <p:cNvSpPr/>
+          <p:nvPr/>
+        </p:nvSpPr>
+        <p:spPr>
+          <a:xfrm>
+            <a:off x="731520" y="5605272"/>
+            <a:ext cx="10698480" cy="786384"/>
+          </a:xfrm>
+          <a:prstGeom prst="rect">
+            <a:avLst/>
+          </a:prstGeom>
+          <a:solidFill>
+            <a:srgbClr val="F4F6FB"/>
+          </a:solidFill>
+          <a:ln/>
+        </p:spPr>
+      </p:sp>
+      <p:sp>
+        <p:nvSpPr>
+          <p:cNvPr id="17" name="Text 15"/>
+          <p:cNvSpPr txBox="1"/>
+          <p:nvPr/>
+        </p:nvSpPr>
+        <p:spPr>
+          <a:xfrm>
+            <a:off x="960120" y="5678424"/>
+            <a:ext cx="2926080" cy="694944"/>
+          </a:xfrm>
+          <a:prstGeom prst="rect">
+            <a:avLst/>
+          </a:prstGeom>
+          <a:noFill/>
+          <a:ln/>
+        </p:spPr>
+        <p:txBody>
+          <a:bodyPr wrap="square" lIns="0" tIns="0" rIns="0" bIns="0" rtlCol="0" anchor="ctr"/>
+          <a:lstStyle/>
+          <a:p>
+            <a:pPr indent="0" marL="0">
+              <a:buNone/>
+            </a:pPr>
+            <a:r>
+              <a:rPr lang="en-US" sz="1500" b="1" dirty="0">
+                <a:solidFill>
+                  <a:srgbClr val="1E2761"/>
+                </a:solidFill>
+                <a:latin typeface="Calibri" pitchFamily="34" charset="0"/>
+                <a:ea typeface="Calibri" pitchFamily="34" charset="-122"/>
+                <a:cs typeface="Calibri" pitchFamily="34" charset="-120"/>
+              </a:rPr>
+              <a:t>Bank transfer</a:t>
+            </a:r>
+            <a:endParaRPr lang="en-US" sz="1500" dirty="0"/>
+          </a:p>
+        </p:txBody>
+      </p:sp>
+      <p:sp>
+        <p:nvSpPr>
+          <p:cNvPr id="18" name="Text 16"/>
+          <p:cNvSpPr txBox="1"/>
+          <p:nvPr/>
+        </p:nvSpPr>
+        <p:spPr>
+          <a:xfrm>
+            <a:off x="4023360" y="5678424"/>
+            <a:ext cx="7132320" cy="694944"/>
+          </a:xfrm>
+          <a:prstGeom prst="rect">
+            <a:avLst/>
+          </a:prstGeom>
+          <a:noFill/>
+          <a:ln/>
+        </p:spPr>
+        <p:txBody>
+          <a:bodyPr wrap="square" lIns="0" tIns="0" rIns="0" bIns="0" rtlCol="0" anchor="ctr"/>
+          <a:lstStyle/>
+          <a:p>
+            <a:pPr indent="0" marL="0">
+              <a:buNone/>
+            </a:pPr>
+            <a:r>
+              <a:rPr lang="en-US" sz="1250" dirty="0">
+                <a:solidFill>
+                  <a:srgbClr val="5A6070"/>
+                </a:solidFill>
+                <a:latin typeface="Calibri" pitchFamily="34" charset="0"/>
+                <a:ea typeface="Calibri" pitchFamily="34" charset="-122"/>
+                <a:cs typeface="Calibri" pitchFamily="34" charset="-120"/>
+              </a:rPr>
               <a:t>Slowest to arrive, cheapest to send. Best if you are being paid a large batch at once.</a:t>
             </a:r>
             <a:endParaRPr lang="en-US" sz="1250" dirty="0"/>
@@ -4774,7 +4872,7 @@
       </p:sp>
       <p:sp>
         <p:nvSpPr>
-          <p:cNvPr id="16" name="Text 14"/>
+          <p:cNvPr id="19" name="Text 17"/>
           <p:cNvSpPr txBox="1"/>
           <p:nvPr/>
         </p:nvSpPr>
